--- a/docs/pitch-deck.pptx
+++ b/docs/pitch-deck.pptx
@@ -3092,7 +3092,7 @@
     <p:bg>
       <p:bgPr>
         <a:solidFill>
-          <a:srgbClr val="0A0A0F"/>
+          <a:srgbClr val="020205"/>
         </a:solidFill>
         <a:effectLst/>
       </p:bgPr>
@@ -3112,8 +3112,8 @@
         </p:nvSpPr>
         <p:spPr>
           <a:xfrm>
-            <a:off x="914400" y="1371600"/>
-            <a:ext cx="10362895" cy="457200"/>
+            <a:off x="914400" y="1188720"/>
+            <a:ext cx="10362895" cy="365760"/>
           </a:xfrm>
           <a:prstGeom prst="rect">
             <a:avLst/>
@@ -3147,8 +3147,8 @@
         </p:nvSpPr>
         <p:spPr>
           <a:xfrm>
-            <a:off x="914400" y="1920240"/>
-            <a:ext cx="10362895" cy="1097280"/>
+            <a:off x="914400" y="1691640"/>
+            <a:ext cx="10362895" cy="1188720"/>
           </a:xfrm>
           <a:prstGeom prst="rect">
             <a:avLst/>
@@ -3163,7 +3163,7 @@
           <a:p>
             <a:pPr algn="ctr"/>
             <a:r>
-              <a:rPr sz="5600" b="1">
+              <a:rPr sz="6000" b="1">
                 <a:solidFill>
                   <a:srgbClr val="FFFFFF"/>
                 </a:solidFill>
@@ -3171,7 +3171,7 @@
               <a:t>StellarSwap</a:t>
             </a:r>
             <a:r>
-              <a:rPr sz="5600" b="1">
+              <a:rPr sz="6000" b="1">
                 <a:solidFill>
                   <a:srgbClr val="A3E635"/>
                 </a:solidFill>
@@ -3189,8 +3189,8 @@
         </p:nvSpPr>
         <p:spPr>
           <a:xfrm>
-            <a:off x="2011680" y="3108960"/>
-            <a:ext cx="8168335" cy="914400"/>
+            <a:off x="1645920" y="2971800"/>
+            <a:ext cx="8899855" cy="914400"/>
           </a:xfrm>
           <a:prstGeom prst="rect">
             <a:avLst/>
@@ -3204,18 +3204,14 @@
           <a:lstStyle/>
           <a:p>
             <a:pPr algn="ctr">
-              <a:defRPr sz="1500">
+              <a:defRPr sz="1550">
                 <a:solidFill>
                   <a:srgbClr val="94A3B8"/>
                 </a:solidFill>
               </a:defRPr>
             </a:pPr>
             <a:r>
-              <a:t>Production Non-Custodial DEX &amp; Soroban Rust Escrow Vault on Stellar</a:t>
-            </a:r>
-            <a:br/>
-            <a:r>
-              <a:t>Instant native path payment swaps, trustless conditional escrows, and unified multi-wallet onboarding.</a:t>
+              <a:t>Non-custodial DEX &amp; Soroban Escrow Vault on Stellar — fast path payment swaps, automated trust-free escrow, and multi-wallet onboarding.</a:t>
             </a:r>
           </a:p>
         </p:txBody>
@@ -3228,14 +3224,14 @@
         </p:nvSpPr>
         <p:spPr>
           <a:xfrm>
-            <a:off x="914400" y="4297680"/>
-            <a:ext cx="2468880" cy="914400"/>
+            <a:off x="914400" y="4160520"/>
+            <a:ext cx="2468880" cy="1005840"/>
           </a:xfrm>
           <a:prstGeom prst="roundRect">
             <a:avLst/>
           </a:prstGeom>
           <a:solidFill>
-            <a:srgbClr val="12121A"/>
+            <a:srgbClr val="09090B"/>
           </a:solidFill>
           <a:ln w="15240">
             <a:solidFill>
@@ -3273,8 +3269,8 @@
         </p:nvSpPr>
         <p:spPr>
           <a:xfrm>
-            <a:off x="914400" y="4407408"/>
-            <a:ext cx="2468880" cy="694944"/>
+            <a:off x="914400" y="4325112"/>
+            <a:ext cx="2468880" cy="676656"/>
           </a:xfrm>
           <a:prstGeom prst="rect">
             <a:avLst/>
@@ -3300,7 +3296,10 @@
           </a:p>
           <a:p>
             <a:pPr algn="ctr">
-              <a:defRPr sz="900">
+              <a:spcBef>
+                <a:spcPts val="300"/>
+              </a:spcBef>
+              <a:defRPr sz="950">
                 <a:solidFill>
                   <a:srgbClr val="94A3B8"/>
                 </a:solidFill>
@@ -3320,14 +3319,14 @@
         </p:nvSpPr>
         <p:spPr>
           <a:xfrm>
-            <a:off x="3566160" y="4297680"/>
-            <a:ext cx="2468880" cy="914400"/>
+            <a:off x="3566160" y="4160520"/>
+            <a:ext cx="2468880" cy="1005840"/>
           </a:xfrm>
           <a:prstGeom prst="roundRect">
             <a:avLst/>
           </a:prstGeom>
           <a:solidFill>
-            <a:srgbClr val="12121A"/>
+            <a:srgbClr val="09090B"/>
           </a:solidFill>
           <a:ln w="15240">
             <a:solidFill>
@@ -3365,8 +3364,8 @@
         </p:nvSpPr>
         <p:spPr>
           <a:xfrm>
-            <a:off x="3566160" y="4407408"/>
-            <a:ext cx="2468880" cy="694944"/>
+            <a:off x="3566160" y="4325112"/>
+            <a:ext cx="2468880" cy="676656"/>
           </a:xfrm>
           <a:prstGeom prst="rect">
             <a:avLst/>
@@ -3392,7 +3391,10 @@
           </a:p>
           <a:p>
             <a:pPr algn="ctr">
-              <a:defRPr sz="900">
+              <a:spcBef>
+                <a:spcPts val="300"/>
+              </a:spcBef>
+              <a:defRPr sz="950">
                 <a:solidFill>
                   <a:srgbClr val="94A3B8"/>
                 </a:solidFill>
@@ -3412,14 +3414,14 @@
         </p:nvSpPr>
         <p:spPr>
           <a:xfrm>
-            <a:off x="6217920" y="4297680"/>
-            <a:ext cx="2468880" cy="914400"/>
+            <a:off x="6217920" y="4160520"/>
+            <a:ext cx="2468880" cy="1005840"/>
           </a:xfrm>
           <a:prstGeom prst="roundRect">
             <a:avLst/>
           </a:prstGeom>
           <a:solidFill>
-            <a:srgbClr val="12121A"/>
+            <a:srgbClr val="09090B"/>
           </a:solidFill>
           <a:ln w="15240">
             <a:solidFill>
@@ -3457,8 +3459,8 @@
         </p:nvSpPr>
         <p:spPr>
           <a:xfrm>
-            <a:off x="6217920" y="4407408"/>
-            <a:ext cx="2468880" cy="694944"/>
+            <a:off x="6217920" y="4325112"/>
+            <a:ext cx="2468880" cy="676656"/>
           </a:xfrm>
           <a:prstGeom prst="rect">
             <a:avLst/>
@@ -3484,7 +3486,10 @@
           </a:p>
           <a:p>
             <a:pPr algn="ctr">
-              <a:defRPr sz="900">
+              <a:spcBef>
+                <a:spcPts val="300"/>
+              </a:spcBef>
+              <a:defRPr sz="950">
                 <a:solidFill>
                   <a:srgbClr val="94A3B8"/>
                 </a:solidFill>
@@ -3504,14 +3509,14 @@
         </p:nvSpPr>
         <p:spPr>
           <a:xfrm>
-            <a:off x="8869680" y="4297680"/>
-            <a:ext cx="2468880" cy="914400"/>
+            <a:off x="8869680" y="4160520"/>
+            <a:ext cx="2468880" cy="1005840"/>
           </a:xfrm>
           <a:prstGeom prst="roundRect">
             <a:avLst/>
           </a:prstGeom>
           <a:solidFill>
-            <a:srgbClr val="12121A"/>
+            <a:srgbClr val="09090B"/>
           </a:solidFill>
           <a:ln w="15240">
             <a:solidFill>
@@ -3549,8 +3554,8 @@
         </p:nvSpPr>
         <p:spPr>
           <a:xfrm>
-            <a:off x="8869680" y="4407408"/>
-            <a:ext cx="2468880" cy="694944"/>
+            <a:off x="8869680" y="4325112"/>
+            <a:ext cx="2468880" cy="676656"/>
           </a:xfrm>
           <a:prstGeom prst="rect">
             <a:avLst/>
@@ -3571,19 +3576,22 @@
               </a:defRPr>
             </a:pPr>
             <a:r>
-              <a:t>🚀 CI / CD AUTOMATION</a:t>
+              <a:t>🚀 CI/CD DEPLOY</a:t>
             </a:r>
           </a:p>
           <a:p>
             <a:pPr algn="ctr">
-              <a:defRPr sz="900">
+              <a:spcBef>
+                <a:spcPts val="300"/>
+              </a:spcBef>
+              <a:defRPr sz="950">
                 <a:solidFill>
                   <a:srgbClr val="94A3B8"/>
                 </a:solidFill>
               </a:defRPr>
             </a:pPr>
             <a:r>
-              <a:t>Contracts &amp; Frontend</a:t>
+              <a:t>Automated Pipelines</a:t>
             </a:r>
           </a:p>
         </p:txBody>
@@ -3596,8 +3604,8 @@
         </p:nvSpPr>
         <p:spPr>
           <a:xfrm>
-            <a:off x="914400" y="5760720"/>
-            <a:ext cx="10362895" cy="457200"/>
+            <a:off x="914400" y="5623560"/>
+            <a:ext cx="10362895" cy="365760"/>
           </a:xfrm>
           <a:prstGeom prst="rect">
             <a:avLst/>
@@ -3672,7 +3680,7 @@
     <p:bg>
       <p:bgPr>
         <a:solidFill>
-          <a:srgbClr val="0A0A0F"/>
+          <a:srgbClr val="020205"/>
         </a:solidFill>
         <a:effectLst/>
       </p:bgPr>
@@ -3693,7 +3701,7 @@
         <p:spPr>
           <a:xfrm>
             <a:off x="731520" y="411480"/>
-            <a:ext cx="3657600" cy="365760"/>
+            <a:ext cx="4114800" cy="320040"/>
           </a:xfrm>
           <a:prstGeom prst="rect">
             <a:avLst/>
@@ -3707,14 +3715,14 @@
           <a:lstStyle/>
           <a:p>
             <a:pPr>
-              <a:defRPr sz="1000" b="1">
+              <a:defRPr sz="1050" b="1">
                 <a:solidFill>
                   <a:srgbClr val="F87171"/>
                 </a:solidFill>
               </a:defRPr>
             </a:pPr>
             <a:r>
-              <a:t>●  THE PROBLEM</a:t>
+              <a:t>●  PROBLEM</a:t>
             </a:r>
           </a:p>
         </p:txBody>
@@ -3727,8 +3735,8 @@
         </p:nvSpPr>
         <p:spPr>
           <a:xfrm>
-            <a:off x="731520" y="731520"/>
-            <a:ext cx="9144000" cy="640080"/>
+            <a:off x="731520" y="713232"/>
+            <a:ext cx="9601200" cy="594360"/>
           </a:xfrm>
           <a:prstGeom prst="rect">
             <a:avLst/>
@@ -3742,15 +3750,15 @@
           <a:lstStyle/>
           <a:p>
             <a:r>
-              <a:rPr sz="2400" b="1">
+              <a:rPr sz="2500" b="1">
                 <a:solidFill>
                   <a:srgbClr val="FFFFFF"/>
                 </a:solidFill>
               </a:rPr>
-              <a:t>The DeFi &amp; Escrow UX Gap on</a:t>
-            </a:r>
-            <a:r>
-              <a:rPr sz="2400" b="1">
+              <a:t>The DeFi UX Gap on</a:t>
+            </a:r>
+            <a:r>
+              <a:rPr sz="2500" b="1">
                 <a:solidFill>
                   <a:srgbClr val="22D3EE"/>
                 </a:solidFill>
@@ -3769,7 +3777,7 @@
         <p:spPr>
           <a:xfrm>
             <a:off x="10515600" y="411480"/>
-            <a:ext cx="914400" cy="365760"/>
+            <a:ext cx="914400" cy="320040"/>
           </a:xfrm>
           <a:prstGeom prst="rect">
             <a:avLst/>
@@ -3783,7 +3791,7 @@
           <a:lstStyle/>
           <a:p>
             <a:pPr algn="r">
-              <a:defRPr sz="1100">
+              <a:defRPr sz="1000">
                 <a:solidFill>
                   <a:srgbClr val="94A3B8"/>
                 </a:solidFill>
@@ -3804,17 +3812,17 @@
         <p:spPr>
           <a:xfrm>
             <a:off x="731520" y="1645920"/>
-            <a:ext cx="5120640" cy="2103120"/>
+            <a:ext cx="5120640" cy="2148840"/>
           </a:xfrm>
           <a:prstGeom prst="roundRect">
             <a:avLst/>
           </a:prstGeom>
           <a:solidFill>
-            <a:srgbClr val="12121A"/>
+            <a:srgbClr val="09090B"/>
           </a:solidFill>
           <a:ln w="15240">
             <a:solidFill>
-              <a:srgbClr val="262637"/>
+              <a:srgbClr val="1E1E24"/>
             </a:solidFill>
           </a:ln>
         </p:spPr>
@@ -3849,7 +3857,7 @@
         <p:spPr>
           <a:xfrm>
             <a:off x="960120" y="1828800"/>
-            <a:ext cx="4663440" cy="1737360"/>
+            <a:ext cx="4663440" cy="1783080"/>
           </a:xfrm>
           <a:prstGeom prst="rect">
             <a:avLst/>
@@ -3885,7 +3893,7 @@
               </a:defRPr>
             </a:pPr>
             <a:r>
-              <a:t>Users must navigate multiple disparate tools to trade on Stellar. Native path payments are underutilized, and competitors add unnecessary smart contract overhead.</a:t>
+              <a:t>Users must navigate multiple platforms to swap tokens on Stellar. No single interface leverages native path payments with real-time orderbook execution. Most DEXes add unnecessary smart contract overhead.</a:t>
             </a:r>
           </a:p>
         </p:txBody>
@@ -3899,17 +3907,17 @@
         <p:spPr>
           <a:xfrm>
             <a:off x="6309360" y="1645920"/>
-            <a:ext cx="5120640" cy="2103120"/>
+            <a:ext cx="5120640" cy="2148840"/>
           </a:xfrm>
           <a:prstGeom prst="roundRect">
             <a:avLst/>
           </a:prstGeom>
           <a:solidFill>
-            <a:srgbClr val="12121A"/>
+            <a:srgbClr val="09090B"/>
           </a:solidFill>
           <a:ln w="15240">
             <a:solidFill>
-              <a:srgbClr val="262637"/>
+              <a:srgbClr val="1E1E24"/>
             </a:solidFill>
           </a:ln>
         </p:spPr>
@@ -3944,7 +3952,7 @@
         <p:spPr>
           <a:xfrm>
             <a:off x="6537960" y="1828800"/>
-            <a:ext cx="4663440" cy="1737360"/>
+            <a:ext cx="4663440" cy="1783080"/>
           </a:xfrm>
           <a:prstGeom prst="rect">
             <a:avLst/>
@@ -3965,7 +3973,7 @@
               </a:defRPr>
             </a:pPr>
             <a:r>
-              <a:t>❌ No Native Escrow Solution</a:t>
+              <a:t>❌ No On-Chain Escrow Solution</a:t>
             </a:r>
           </a:p>
           <a:p>
@@ -3980,7 +3988,7 @@
               </a:defRPr>
             </a:pPr>
             <a:r>
-              <a:t>Stellar lacks a standardized, trust-free escrow mechanism. P2P trades, freelance milestones, and conditional settlements rely on centralized intermediaries or off-chain trust.</a:t>
+              <a:t>Stellar has no mainstream trust-free escrow service. P2P trades, freelance payments, and conditional transfers rely on off-chain trust or centralized intermediaries.</a:t>
             </a:r>
           </a:p>
         </p:txBody>
@@ -3994,17 +4002,17 @@
         <p:spPr>
           <a:xfrm>
             <a:off x="731520" y="4114800"/>
-            <a:ext cx="5120640" cy="2103120"/>
+            <a:ext cx="5120640" cy="2148840"/>
           </a:xfrm>
           <a:prstGeom prst="roundRect">
             <a:avLst/>
           </a:prstGeom>
           <a:solidFill>
-            <a:srgbClr val="12121A"/>
+            <a:srgbClr val="09090B"/>
           </a:solidFill>
           <a:ln w="15240">
             <a:solidFill>
-              <a:srgbClr val="262637"/>
+              <a:srgbClr val="1E1E24"/>
             </a:solidFill>
           </a:ln>
         </p:spPr>
@@ -4039,7 +4047,7 @@
         <p:spPr>
           <a:xfrm>
             <a:off x="960120" y="4297680"/>
-            <a:ext cx="4663440" cy="1737360"/>
+            <a:ext cx="4663440" cy="1783080"/>
           </a:xfrm>
           <a:prstGeom prst="rect">
             <a:avLst/>
@@ -4075,7 +4083,7 @@
               </a:defRPr>
             </a:pPr>
             <a:r>
-              <a:t>DApps frequently support only 1 or 2 wallets. Users without Freighter encounter broken flows. No universal multi-wallet fallback exists for new Web3 users.</a:t>
+              <a:t>Each dApp only supports 1-2 wallets. Users with Freighter can't use Lobstr-only dApps. No unified multi-wallet connection layer exists for Stellar.</a:t>
             </a:r>
           </a:p>
         </p:txBody>
@@ -4089,17 +4097,17 @@
         <p:spPr>
           <a:xfrm>
             <a:off x="6309360" y="4114800"/>
-            <a:ext cx="5120640" cy="2103120"/>
+            <a:ext cx="5120640" cy="2148840"/>
           </a:xfrm>
           <a:prstGeom prst="roundRect">
             <a:avLst/>
           </a:prstGeom>
           <a:solidFill>
-            <a:srgbClr val="12121A"/>
+            <a:srgbClr val="09090B"/>
           </a:solidFill>
           <a:ln w="15240">
             <a:solidFill>
-              <a:srgbClr val="262637"/>
+              <a:srgbClr val="1E1E24"/>
             </a:solidFill>
           </a:ln>
         </p:spPr>
@@ -4134,7 +4142,7 @@
         <p:spPr>
           <a:xfrm>
             <a:off x="6537960" y="4297680"/>
-            <a:ext cx="4663440" cy="1737360"/>
+            <a:ext cx="4663440" cy="1783080"/>
           </a:xfrm>
           <a:prstGeom prst="rect">
             <a:avLst/>
@@ -4155,7 +4163,7 @@
               </a:defRPr>
             </a:pPr>
             <a:r>
-              <a:t>❌ Cryptic Error Handling</a:t>
+              <a:t>❌ Poor Error Handling</a:t>
             </a:r>
           </a:p>
           <a:p>
@@ -4170,7 +4178,7 @@
               </a:defRPr>
             </a:pPr>
             <a:r>
-              <a:t>Most DEX interfaces show raw Horizon error codes (op_underfunded, tx_failed). Users are left stranded without actionable recovery instructions or retry mechanisms.</a:t>
+              <a:t>Most Stellar dApps show cryptic transaction errors. No contextual recovery hints, no retry logic, no distinction between wallet errors and network failures.</a:t>
             </a:r>
           </a:p>
         </p:txBody>
@@ -4189,7 +4197,7 @@
     <p:bg>
       <p:bgPr>
         <a:solidFill>
-          <a:srgbClr val="0A0A0F"/>
+          <a:srgbClr val="020205"/>
         </a:solidFill>
         <a:effectLst/>
       </p:bgPr>
@@ -4210,7 +4218,7 @@
         <p:spPr>
           <a:xfrm>
             <a:off x="731520" y="411480"/>
-            <a:ext cx="3657600" cy="365760"/>
+            <a:ext cx="4114800" cy="320040"/>
           </a:xfrm>
           <a:prstGeom prst="rect">
             <a:avLst/>
@@ -4224,14 +4232,14 @@
           <a:lstStyle/>
           <a:p>
             <a:pPr>
-              <a:defRPr sz="1000" b="1">
+              <a:defRPr sz="1050" b="1">
                 <a:solidFill>
                   <a:srgbClr val="A3E635"/>
                 </a:solidFill>
               </a:defRPr>
             </a:pPr>
             <a:r>
-              <a:t>●  THE SOLUTION</a:t>
+              <a:t>●  SOLUTION</a:t>
             </a:r>
           </a:p>
         </p:txBody>
@@ -4244,8 +4252,8 @@
         </p:nvSpPr>
         <p:spPr>
           <a:xfrm>
-            <a:off x="731520" y="731520"/>
-            <a:ext cx="9144000" cy="640080"/>
+            <a:off x="731520" y="713232"/>
+            <a:ext cx="9601200" cy="594360"/>
           </a:xfrm>
           <a:prstGeom prst="rect">
             <a:avLst/>
@@ -4259,7 +4267,7 @@
           <a:lstStyle/>
           <a:p>
             <a:r>
-              <a:rPr sz="2400" b="1">
+              <a:rPr sz="2500" b="1">
                 <a:solidFill>
                   <a:srgbClr val="FFFFFF"/>
                 </a:solidFill>
@@ -4267,12 +4275,12 @@
               <a:t>StellarSwap+ — Unified DEX &amp;</a:t>
             </a:r>
             <a:r>
-              <a:rPr sz="2400" b="1">
+              <a:rPr sz="2500" b="1">
                 <a:solidFill>
                   <a:srgbClr val="A3E635"/>
                 </a:solidFill>
               </a:rPr>
-              <a:t> Escrow Vault</a:t>
+              <a:t> Escrow</a:t>
             </a:r>
           </a:p>
         </p:txBody>
@@ -4286,7 +4294,7 @@
         <p:spPr>
           <a:xfrm>
             <a:off x="10515600" y="411480"/>
-            <a:ext cx="914400" cy="365760"/>
+            <a:ext cx="914400" cy="320040"/>
           </a:xfrm>
           <a:prstGeom prst="rect">
             <a:avLst/>
@@ -4300,7 +4308,7 @@
           <a:lstStyle/>
           <a:p>
             <a:pPr algn="r">
-              <a:defRPr sz="1100">
+              <a:defRPr sz="1000">
                 <a:solidFill>
                   <a:srgbClr val="94A3B8"/>
                 </a:solidFill>
@@ -4342,7 +4350,7 @@
               </a:defRPr>
             </a:pPr>
             <a:r>
-              <a:t>A single production-grade platform combining native path payment DEX routing, Soroban Rust escrow vaults, and multi-wallet access.</a:t>
+              <a:t>A single production-ready dApp that combines Stellar's native path payment swap engine with a custom Soroban Rust escrow vault — all through one multi-wallet interface.</a:t>
             </a:r>
           </a:p>
         </p:txBody>
@@ -4362,7 +4370,7 @@
             <a:avLst/>
           </a:prstGeom>
           <a:solidFill>
-            <a:srgbClr val="12121A"/>
+            <a:srgbClr val="09090B"/>
           </a:solidFill>
           <a:ln w="15240">
             <a:solidFill>
@@ -4452,19 +4460,19 @@
               </a:defRPr>
             </a:pPr>
             <a:r>
-              <a:t>• Best-rate execution across multiple path assets (XLM, USDC, EURC, yXLM)</a:t>
+              <a:t>• Execute XLM ↔ USDC swaps via Stellar's native orderbook path payments.</a:t>
             </a:r>
             <a:br/>
             <a:r>
-              <a:t>• Zero smart contract lockup risk for native swaps</a:t>
+              <a:t>• Zero smart contract vulnerability for standard swaps.</a:t>
             </a:r>
             <a:br/>
             <a:r>
-              <a:t>• 3-5 second finality with sub-cent network fees</a:t>
+              <a:t>• Best execution rate across multiple intermediate assets.</a:t>
             </a:r>
             <a:br/>
             <a:r>
-              <a:t>• Interactive slippage tolerance &amp; real-time path inspection</a:t>
+              <a:t>• Sub-second route calculation with customizable slippage.</a:t>
             </a:r>
           </a:p>
         </p:txBody>
@@ -4484,7 +4492,7 @@
             <a:avLst/>
           </a:prstGeom>
           <a:solidFill>
-            <a:srgbClr val="12121A"/>
+            <a:srgbClr val="09090B"/>
           </a:solidFill>
           <a:ln w="15240">
             <a:solidFill>
@@ -4574,19 +4582,19 @@
               </a:defRPr>
             </a:pPr>
             <a:r>
-              <a:t>• Rust-based smart contract (Create → Fund → Release/Refund)</a:t>
+              <a:t>• Create → Fund → Release/Refund lifecycle in Soroban Rust.</a:t>
             </a:r>
             <a:br/>
             <a:r>
-              <a:t>• Automated timeout reclaim protection for buyers/payers</a:t>
+              <a:t>• Time-locked asset custody with automated timeout refunds.</a:t>
             </a:r>
             <a:br/>
             <a:r>
-              <a:t>• Full event emission pipeline synced to frontend</a:t>
+              <a:t>• All on-chain, auditable, and decentralized on Testnet.</a:t>
             </a:r>
             <a:br/>
             <a:r>
-              <a:t>• Non-custodial, decentralized, and audited on Testnet</a:t>
+              <a:t>• Live contract event emission synced to reactive event feed.</a:t>
             </a:r>
           </a:p>
         </p:txBody>
@@ -4606,7 +4614,7 @@
             <a:avLst/>
           </a:prstGeom>
           <a:solidFill>
-            <a:srgbClr val="12121A"/>
+            <a:srgbClr val="09090B"/>
           </a:solidFill>
           <a:ln w="15240">
             <a:solidFill>
@@ -4696,19 +4704,19 @@
               </a:defRPr>
             </a:pPr>
             <a:r>
-              <a:t>• Instant support for Freighter, Albedo, Lobstr, xBull &amp; Rabet</a:t>
+              <a:t>• Freighter, Albedo, Lobstr, xBull, Rabet, and Demo Account.</a:t>
             </a:r>
             <a:br/>
             <a:r>
-              <a:t>• 1-Click Demo Testnet Account with automated funding</a:t>
+              <a:t>• One universal connection modal with web auth fallback.</a:t>
             </a:r>
             <a:br/>
             <a:r>
-              <a:t>• Sentry-monitored error handling with recovery suggestions</a:t>
+              <a:t>• Non-custodial signing for all operations with clear error states.</a:t>
             </a:r>
             <a:br/>
             <a:r>
-              <a:t>• Dynamic Horizon balance loading with reserve calculation</a:t>
+              <a:t>• Horizon balance loading with dynamic reserve calculation.</a:t>
             </a:r>
           </a:p>
         </p:txBody>
@@ -4727,7 +4735,7 @@
     <p:bg>
       <p:bgPr>
         <a:solidFill>
-          <a:srgbClr val="0A0A0F"/>
+          <a:srgbClr val="020205"/>
         </a:solidFill>
         <a:effectLst/>
       </p:bgPr>
@@ -4748,7 +4756,7 @@
         <p:spPr>
           <a:xfrm>
             <a:off x="731520" y="411480"/>
-            <a:ext cx="3657600" cy="365760"/>
+            <a:ext cx="4114800" cy="320040"/>
           </a:xfrm>
           <a:prstGeom prst="rect">
             <a:avLst/>
@@ -4762,14 +4770,14 @@
           <a:lstStyle/>
           <a:p>
             <a:pPr>
-              <a:defRPr sz="1000" b="1">
+              <a:defRPr sz="1050" b="1">
                 <a:solidFill>
                   <a:srgbClr val="22D3EE"/>
                 </a:solidFill>
               </a:defRPr>
             </a:pPr>
             <a:r>
-              <a:t>●  MARKET OPPORTUNITY</a:t>
+              <a:t>●  MARKET</a:t>
             </a:r>
           </a:p>
         </p:txBody>
@@ -4782,8 +4790,8 @@
         </p:nvSpPr>
         <p:spPr>
           <a:xfrm>
-            <a:off x="731520" y="731520"/>
-            <a:ext cx="9144000" cy="640080"/>
+            <a:off x="731520" y="713232"/>
+            <a:ext cx="9601200" cy="594360"/>
           </a:xfrm>
           <a:prstGeom prst="rect">
             <a:avLst/>
@@ -4797,20 +4805,20 @@
           <a:lstStyle/>
           <a:p>
             <a:r>
-              <a:rPr sz="2400" b="1">
+              <a:rPr sz="2500" b="1">
                 <a:solidFill>
                   <a:srgbClr val="FFFFFF"/>
                 </a:solidFill>
               </a:rPr>
-              <a:t>Why Build on</a:t>
-            </a:r>
-            <a:r>
-              <a:rPr sz="2400" b="1">
+              <a:t>Market</a:t>
+            </a:r>
+            <a:r>
+              <a:rPr sz="2500" b="1">
                 <a:solidFill>
                   <a:srgbClr val="22D3EE"/>
                 </a:solidFill>
               </a:rPr>
-              <a:t> Stellar Network?</a:t>
+              <a:t> Opportunity</a:t>
             </a:r>
           </a:p>
         </p:txBody>
@@ -4824,7 +4832,7 @@
         <p:spPr>
           <a:xfrm>
             <a:off x="10515600" y="411480"/>
-            <a:ext cx="914400" cy="365760"/>
+            <a:ext cx="914400" cy="320040"/>
           </a:xfrm>
           <a:prstGeom prst="rect">
             <a:avLst/>
@@ -4838,7 +4846,7 @@
           <a:lstStyle/>
           <a:p>
             <a:pPr algn="r">
-              <a:defRPr sz="1100">
+              <a:defRPr sz="1000">
                 <a:solidFill>
                   <a:srgbClr val="94A3B8"/>
                 </a:solidFill>
@@ -4865,11 +4873,11 @@
             <a:avLst/>
           </a:prstGeom>
           <a:solidFill>
-            <a:srgbClr val="12121A"/>
+            <a:srgbClr val="09090B"/>
           </a:solidFill>
           <a:ln w="15240">
             <a:solidFill>
-              <a:srgbClr val="262637"/>
+              <a:srgbClr val="1E1E24"/>
             </a:solidFill>
           </a:ln>
         </p:spPr>
@@ -4957,11 +4965,11 @@
             <a:avLst/>
           </a:prstGeom>
           <a:solidFill>
-            <a:srgbClr val="12121A"/>
+            <a:srgbClr val="09090B"/>
           </a:solidFill>
           <a:ln w="15240">
             <a:solidFill>
-              <a:srgbClr val="262637"/>
+              <a:srgbClr val="1E1E24"/>
             </a:solidFill>
           </a:ln>
         </p:spPr>
@@ -5029,7 +5037,7 @@
               </a:defRPr>
             </a:pPr>
             <a:r>
-              <a:t>Active Stellar Accounts</a:t>
+              <a:t>Stellar Active Accounts</a:t>
             </a:r>
           </a:p>
         </p:txBody>
@@ -5049,11 +5057,11 @@
             <a:avLst/>
           </a:prstGeom>
           <a:solidFill>
-            <a:srgbClr val="12121A"/>
+            <a:srgbClr val="09090B"/>
           </a:solidFill>
           <a:ln w="15240">
             <a:solidFill>
-              <a:srgbClr val="262637"/>
+              <a:srgbClr val="1E1E24"/>
             </a:solidFill>
           </a:ln>
         </p:spPr>
@@ -5121,7 +5129,7 @@
               </a:defRPr>
             </a:pPr>
             <a:r>
-              <a:t>Existing Dedicated Escrow Solutions on Stellar</a:t>
+              <a:t>Escrow Solutions on Stellar Today</a:t>
             </a:r>
           </a:p>
         </p:txBody>
@@ -5141,11 +5149,11 @@
             <a:avLst/>
           </a:prstGeom>
           <a:solidFill>
-            <a:srgbClr val="12121A"/>
+            <a:srgbClr val="09090B"/>
           </a:solidFill>
           <a:ln w="15240">
             <a:solidFill>
-              <a:srgbClr val="262637"/>
+              <a:srgbClr val="1E1E24"/>
             </a:solidFill>
           </a:ln>
         </p:spPr>
@@ -5194,29 +5202,29 @@
           <a:lstStyle/>
           <a:p>
             <a:pPr>
-              <a:defRPr sz="1600" b="1">
+              <a:defRPr sz="1800" b="1">
                 <a:solidFill>
                   <a:srgbClr val="FFFFFF"/>
                 </a:solidFill>
               </a:defRPr>
             </a:pPr>
             <a:r>
-              <a:t>Key Competitive Advantages of Stellar</a:t>
+              <a:t>Why Stellar?</a:t>
             </a:r>
           </a:p>
           <a:p>
             <a:pPr>
               <a:spcBef>
-                <a:spcPts val="800"/>
+                <a:spcPts val="900"/>
               </a:spcBef>
             </a:pPr>
             <a:r>
-              <a:rPr b="1" sz="1050">
+              <a:rPr b="1" sz="1100">
                 <a:solidFill>
                   <a:srgbClr val="A3E635"/>
                 </a:solidFill>
               </a:rPr>
-              <a:t>⚡ 3–5 Second Finality — </a:t>
+              <a:t>✓  3-5 second finality — </a:t>
             </a:r>
             <a:r>
               <a:rPr sz="1000">
@@ -5224,22 +5232,22 @@
                   <a:srgbClr val="94A3B8"/>
                 </a:solidFill>
               </a:rPr>
-              <a:t>Near-instant transaction settlement without waiting minutes for multi-block confirmations.</a:t>
+              <a:t>Instant transaction confirmation for DEX trades and escrow actions.</a:t>
             </a:r>
           </a:p>
           <a:p>
             <a:pPr>
               <a:spcBef>
-                <a:spcPts val="800"/>
+                <a:spcPts val="900"/>
               </a:spcBef>
             </a:pPr>
             <a:r>
-              <a:rPr b="1" sz="1050">
+              <a:rPr b="1" sz="1100">
                 <a:solidFill>
                   <a:srgbClr val="A3E635"/>
                 </a:solidFill>
               </a:rPr>
-              <a:t>💰 Sub-Cent Network Fees — </a:t>
+              <a:t>✓  ~$0.00001 per transaction — </a:t>
             </a:r>
             <a:r>
               <a:rPr sz="1000">
@@ -5247,22 +5255,22 @@
                   <a:srgbClr val="94A3B8"/>
                 </a:solidFill>
               </a:rPr>
-              <a:t>Swaps and escrow actions cost ~$0.00001 per operation, enabling micro-transactions.</a:t>
+              <a:t>Near-zero transaction fees make micro-swaps and escrow affordable.</a:t>
             </a:r>
           </a:p>
           <a:p>
             <a:pPr>
               <a:spcBef>
-                <a:spcPts val="800"/>
+                <a:spcPts val="900"/>
               </a:spcBef>
             </a:pPr>
             <a:r>
-              <a:rPr b="1" sz="1050">
+              <a:rPr b="1" sz="1100">
                 <a:solidFill>
                   <a:srgbClr val="A3E635"/>
                 </a:solidFill>
               </a:rPr>
-              <a:t>🔄 Native DEX Orderbook — </a:t>
+              <a:t>✓  Native path payment for DEX aggregation — </a:t>
             </a:r>
             <a:r>
               <a:rPr sz="1000">
@@ -5270,22 +5278,22 @@
                   <a:srgbClr val="94A3B8"/>
                 </a:solidFill>
               </a:rPr>
-              <a:t>Protocol-level path payment finding matches cross-asset orders with minimal slippage.</a:t>
+              <a:t>Built-in orderbook routing finds best multi-hop conversion rates.</a:t>
             </a:r>
           </a:p>
           <a:p>
             <a:pPr>
               <a:spcBef>
-                <a:spcPts val="800"/>
+                <a:spcPts val="900"/>
               </a:spcBef>
             </a:pPr>
             <a:r>
-              <a:rPr b="1" sz="1050">
+              <a:rPr b="1" sz="1100">
                 <a:solidFill>
                   <a:srgbClr val="A3E635"/>
                 </a:solidFill>
               </a:rPr>
-              <a:t>🛡️ Soroban Smart Contracts — </a:t>
+              <a:t>✓  Soroban smart contracts (Rust/WASM) — </a:t>
             </a:r>
             <a:r>
               <a:rPr sz="1000">
@@ -5293,22 +5301,22 @@
                   <a:srgbClr val="94A3B8"/>
                 </a:solidFill>
               </a:rPr>
-              <a:t>High-performance Rust/WASM execution environment with isolated state and deterministic fees.</a:t>
+              <a:t>Turing-complete, high-speed contract engine with deterministic state.</a:t>
             </a:r>
           </a:p>
           <a:p>
             <a:pPr>
               <a:spcBef>
-                <a:spcPts val="800"/>
+                <a:spcPts val="900"/>
               </a:spcBef>
             </a:pPr>
             <a:r>
-              <a:rPr b="1" sz="1050">
+              <a:rPr b="1" sz="1100">
                 <a:solidFill>
                   <a:srgbClr val="A3E635"/>
                 </a:solidFill>
               </a:rPr>
-              <a:t>🌍 Global Stablecoin Hub — </a:t>
+              <a:t>✓  Growing ecosystem &amp; institutional adoption — </a:t>
             </a:r>
             <a:r>
               <a:rPr sz="1000">
@@ -5316,7 +5324,7 @@
                   <a:srgbClr val="94A3B8"/>
                 </a:solidFill>
               </a:rPr>
-              <a:t>Tier-1 liquidity for USDC and EURC natively supported on Stellar ledger.</a:t>
+              <a:t>USDC &amp; EURC anchors with multi-billion dollar real-world asset volume.</a:t>
             </a:r>
           </a:p>
         </p:txBody>
@@ -5335,7 +5343,7 @@
     <p:bg>
       <p:bgPr>
         <a:solidFill>
-          <a:srgbClr val="0A0A0F"/>
+          <a:srgbClr val="020205"/>
         </a:solidFill>
         <a:effectLst/>
       </p:bgPr>
@@ -5356,7 +5364,7 @@
         <p:spPr>
           <a:xfrm>
             <a:off x="731520" y="411480"/>
-            <a:ext cx="3657600" cy="365760"/>
+            <a:ext cx="4114800" cy="320040"/>
           </a:xfrm>
           <a:prstGeom prst="rect">
             <a:avLst/>
@@ -5370,9 +5378,9 @@
           <a:lstStyle/>
           <a:p>
             <a:pPr>
-              <a:defRPr sz="1000" b="1">
-                <a:solidFill>
-                  <a:srgbClr val="3B82F6"/>
+              <a:defRPr sz="1050" b="1">
+                <a:solidFill>
+                  <a:srgbClr val="A3E635"/>
                 </a:solidFill>
               </a:defRPr>
             </a:pPr>
@@ -5390,8 +5398,8 @@
         </p:nvSpPr>
         <p:spPr>
           <a:xfrm>
-            <a:off x="731520" y="731520"/>
-            <a:ext cx="9144000" cy="640080"/>
+            <a:off x="731520" y="713232"/>
+            <a:ext cx="9601200" cy="594360"/>
           </a:xfrm>
           <a:prstGeom prst="rect">
             <a:avLst/>
@@ -5405,20 +5413,20 @@
           <a:lstStyle/>
           <a:p>
             <a:r>
-              <a:rPr sz="2400" b="1">
+              <a:rPr sz="2500" b="1">
                 <a:solidFill>
                   <a:srgbClr val="FFFFFF"/>
                 </a:solidFill>
               </a:rPr>
-              <a:t>Full-Stack Production</a:t>
-            </a:r>
-            <a:r>
-              <a:rPr sz="2400" b="1">
-                <a:solidFill>
-                  <a:srgbClr val="3B82F6"/>
+              <a:t>Technical</a:t>
+            </a:r>
+            <a:r>
+              <a:rPr sz="2500" b="1">
+                <a:solidFill>
+                  <a:srgbClr val="A3E635"/>
                 </a:solidFill>
               </a:rPr>
-              <a:t> Technical Stack</a:t>
+              <a:t> Architecture</a:t>
             </a:r>
           </a:p>
         </p:txBody>
@@ -5432,7 +5440,7 @@
         <p:spPr>
           <a:xfrm>
             <a:off x="10515600" y="411480"/>
-            <a:ext cx="914400" cy="365760"/>
+            <a:ext cx="914400" cy="320040"/>
           </a:xfrm>
           <a:prstGeom prst="rect">
             <a:avLst/>
@@ -5446,7 +5454,7 @@
           <a:lstStyle/>
           <a:p>
             <a:pPr algn="r">
-              <a:defRPr sz="1100">
+              <a:defRPr sz="1000">
                 <a:solidFill>
                   <a:srgbClr val="94A3B8"/>
                 </a:solidFill>
@@ -5473,7 +5481,7 @@
             <a:avLst/>
           </a:prstGeom>
           <a:solidFill>
-            <a:srgbClr val="12121A"/>
+            <a:srgbClr val="09090B"/>
           </a:solidFill>
           <a:ln w="15240">
             <a:solidFill>
@@ -5533,7 +5541,7 @@
               </a:defRPr>
             </a:pPr>
             <a:r>
-              <a:t>🖥️ FRONTEND LAYER</a:t>
+              <a:t>FRONTEND</a:t>
             </a:r>
           </a:p>
           <a:p>
@@ -5556,7 +5564,7 @@
                   <a:srgbClr val="94A3B8"/>
                 </a:solidFill>
               </a:rPr>
-              <a:t>High-performance SPA with strict typing</a:t>
+              <a:t>Type-safe modular application</a:t>
             </a:r>
           </a:p>
           <a:p>
@@ -5571,7 +5579,7 @@
                   <a:srgbClr val="FFFFFF"/>
                 </a:solidFill>
               </a:rPr>
-              <a:t>• TailwindCSS &amp; Glassmorphism: </a:t>
+              <a:t>• TailwindCSS + Custom Dark Theme: </a:t>
             </a:r>
             <a:r>
               <a:rPr sz="900">
@@ -5579,7 +5587,7 @@
                   <a:srgbClr val="94A3B8"/>
                 </a:solidFill>
               </a:rPr>
-              <a:t>Responsive dark theme with custom design tokens</a:t>
+              <a:t>Rich glassmorphism design system</a:t>
             </a:r>
           </a:p>
           <a:p>
@@ -5594,7 +5602,7 @@
                   <a:srgbClr val="FFFFFF"/>
                 </a:solidFill>
               </a:rPr>
-              <a:t>• React.lazy() + Suspense: </a:t>
+              <a:t>• React.lazy() Code Splitting: </a:t>
             </a:r>
             <a:r>
               <a:rPr sz="900">
@@ -5602,7 +5610,7 @@
                   <a:srgbClr val="94A3B8"/>
                 </a:solidFill>
               </a:rPr>
-              <a:t>Granular chunk code splitting with error retry</a:t>
+              <a:t>Resilient chunk loading with retry</a:t>
             </a:r>
           </a:p>
           <a:p>
@@ -5617,7 +5625,7 @@
                   <a:srgbClr val="FFFFFF"/>
                 </a:solidFill>
               </a:rPr>
-              <a:t>• StellarWalletsKit &amp; Albedo: </a:t>
+              <a:t>• Sentry SDK + Web Vitals: </a:t>
             </a:r>
             <a:r>
               <a:rPr sz="900">
@@ -5625,7 +5633,30 @@
                   <a:srgbClr val="94A3B8"/>
                 </a:solidFill>
               </a:rPr>
-              <a:t>Multi-wallet connection &amp; fallback authentication</a:t>
+              <a:t>Real-time client monitoring &amp; telemetry</a:t>
+            </a:r>
+          </a:p>
+          <a:p>
+            <a:pPr>
+              <a:spcBef>
+                <a:spcPts val="300"/>
+              </a:spcBef>
+            </a:pPr>
+            <a:r>
+              <a:rPr b="1" sz="950">
+                <a:solidFill>
+                  <a:srgbClr val="FFFFFF"/>
+                </a:solidFill>
+              </a:rPr>
+              <a:t>• StellarWalletsKit Multi-Wallet: </a:t>
+            </a:r>
+            <a:r>
+              <a:rPr sz="900">
+                <a:solidFill>
+                  <a:srgbClr val="94A3B8"/>
+                </a:solidFill>
+              </a:rPr>
+              <a:t>Universal wallet adapter integration</a:t>
             </a:r>
           </a:p>
         </p:txBody>
@@ -5645,7 +5676,7 @@
             <a:avLst/>
           </a:prstGeom>
           <a:solidFill>
-            <a:srgbClr val="12121A"/>
+            <a:srgbClr val="09090B"/>
           </a:solidFill>
           <a:ln w="15240">
             <a:solidFill>
@@ -5705,7 +5736,7 @@
               </a:defRPr>
             </a:pPr>
             <a:r>
-              <a:t>🔒 SMART CONTRACT LAYER</a:t>
+              <a:t>SMART CONTRACTS</a:t>
             </a:r>
           </a:p>
           <a:p>
@@ -5720,7 +5751,7 @@
                   <a:srgbClr val="FFFFFF"/>
                 </a:solidFill>
               </a:rPr>
-              <a:t>• Soroban Rust Escrow Vault: </a:t>
+              <a:t>• Soroban Escrow Vault (Rust): </a:t>
             </a:r>
             <a:r>
               <a:rPr sz="900">
@@ -5728,7 +5759,7 @@
                   <a:srgbClr val="94A3B8"/>
                 </a:solidFill>
               </a:rPr>
-              <a:t>Non-custodial deposit, release, &amp; timeout refund</a:t>
+              <a:t>Create, fund, release, &amp; timeout refund</a:t>
             </a:r>
           </a:p>
           <a:p>
@@ -5743,7 +5774,7 @@
                   <a:srgbClr val="FFFFFF"/>
                 </a:solidFill>
               </a:rPr>
-              <a:t>• Soroban AMM Swap Pool: </a:t>
+              <a:t>• Soroban AMM Swap Pool (Rust): </a:t>
             </a:r>
             <a:r>
               <a:rPr sz="900">
@@ -5751,7 +5782,7 @@
                   <a:srgbClr val="94A3B8"/>
                 </a:solidFill>
               </a:rPr>
-              <a:t>Constant-product liquidity pool implementation</a:t>
+              <a:t>Constant-product liquidity pool</a:t>
             </a:r>
           </a:p>
           <a:p>
@@ -5766,7 +5797,7 @@
                   <a:srgbClr val="FFFFFF"/>
                 </a:solidFill>
               </a:rPr>
-              <a:t>• 13 Unit Tests (Rust): </a:t>
+              <a:t>• 13 Unit Tests (7 + 6): </a:t>
             </a:r>
             <a:r>
               <a:rPr sz="900">
@@ -5774,7 +5805,7 @@
                   <a:srgbClr val="94A3B8"/>
                 </a:solidFill>
               </a:rPr>
-              <a:t>100% test coverage across happy paths &amp; edge cases</a:t>
+              <a:t>100% test coverage for contracts</a:t>
             </a:r>
           </a:p>
           <a:p>
@@ -5789,7 +5820,7 @@
                   <a:srgbClr val="FFFFFF"/>
                 </a:solidFill>
               </a:rPr>
-              <a:t>• Automated CI Cargo Checks: </a:t>
+              <a:t>• cargo fmt + build + test CI: </a:t>
             </a:r>
             <a:r>
               <a:rPr sz="900">
@@ -5797,7 +5828,7 @@
                   <a:srgbClr val="94A3B8"/>
                 </a:solidFill>
               </a:rPr>
-              <a:t>cargo fmt, clippy, build, and test on every push</a:t>
+              <a:t>Strict linting and automated checks</a:t>
             </a:r>
           </a:p>
         </p:txBody>
@@ -5817,7 +5848,7 @@
             <a:avLst/>
           </a:prstGeom>
           <a:solidFill>
-            <a:srgbClr val="12121A"/>
+            <a:srgbClr val="09090B"/>
           </a:solidFill>
           <a:ln w="15240">
             <a:solidFill>
@@ -5877,7 +5908,7 @@
               </a:defRPr>
             </a:pPr>
             <a:r>
-              <a:t>🚀 CI / CD &amp; DEPLOYMENT</a:t>
+              <a:t>CI/CD PIPELINE</a:t>
             </a:r>
           </a:p>
           <a:p>
@@ -5892,7 +5923,7 @@
                   <a:srgbClr val="FFFFFF"/>
                 </a:solidFill>
               </a:rPr>
-              <a:t>• GitHub Actions Contract CI: </a:t>
+              <a:t>• GitHub Actions — Contract CI: </a:t>
             </a:r>
             <a:r>
               <a:rPr sz="900">
@@ -5900,7 +5931,7 @@
                   <a:srgbClr val="94A3B8"/>
                 </a:solidFill>
               </a:rPr>
-              <a:t>Automated Rust WASM compilation &amp; test matrix</a:t>
+              <a:t>WASM target build and test matrix</a:t>
             </a:r>
           </a:p>
           <a:p>
@@ -5915,7 +5946,7 @@
                   <a:srgbClr val="FFFFFF"/>
                 </a:solidFill>
               </a:rPr>
-              <a:t>• GitHub Actions Frontend CI: </a:t>
+              <a:t>• GitHub Actions — Frontend CI: </a:t>
             </a:r>
             <a:r>
               <a:rPr sz="900">
@@ -5923,7 +5954,7 @@
                   <a:srgbClr val="94A3B8"/>
                 </a:solidFill>
               </a:rPr>
-              <a:t>Lint, typecheck, &amp; production build validation</a:t>
+              <a:t>Typecheck, lint, and build verification</a:t>
             </a:r>
           </a:p>
           <a:p>
@@ -5938,7 +5969,7 @@
                   <a:srgbClr val="FFFFFF"/>
                 </a:solidFill>
               </a:rPr>
-              <a:t>• CD Deployment Workflow: </a:t>
+              <a:t>• GitHub Actions — CD Deploy: </a:t>
             </a:r>
             <a:r>
               <a:rPr sz="900">
@@ -5946,7 +5977,7 @@
                   <a:srgbClr val="94A3B8"/>
                 </a:solidFill>
               </a:rPr>
-              <a:t>Automated deployment pipeline to Vercel &amp; Testnet</a:t>
+              <a:t>Automated production deployment</a:t>
             </a:r>
           </a:p>
           <a:p>
@@ -5961,7 +5992,7 @@
                   <a:srgbClr val="FFFFFF"/>
                 </a:solidFill>
               </a:rPr>
-              <a:t>• Vercel Edge Global CDN: </a:t>
+              <a:t>• Vercel Production Hosting: </a:t>
             </a:r>
             <a:r>
               <a:rPr sz="900">
@@ -5969,7 +6000,7 @@
                   <a:srgbClr val="94A3B8"/>
                 </a:solidFill>
               </a:rPr>
-              <a:t>Sub-100ms global static asset delivery</a:t>
+              <a:t>Edge-optimized global CDN distribution</a:t>
             </a:r>
           </a:p>
         </p:txBody>
@@ -5989,7 +6020,7 @@
             <a:avLst/>
           </a:prstGeom>
           <a:solidFill>
-            <a:srgbClr val="12121A"/>
+            <a:srgbClr val="09090B"/>
           </a:solidFill>
           <a:ln w="15240">
             <a:solidFill>
@@ -6049,7 +6080,7 @@
               </a:defRPr>
             </a:pPr>
             <a:r>
-              <a:t>🛡️ OBSERVABILITY &amp; SECURITY</a:t>
+              <a:t>INFRASTRUCTURE</a:t>
             </a:r>
           </a:p>
           <a:p>
@@ -6064,7 +6095,7 @@
                   <a:srgbClr val="FFFFFF"/>
                 </a:solidFill>
               </a:rPr>
-              <a:t>• Sentry SDK Error Tracking: </a:t>
+              <a:t>• Stellar Horizon API + Soroban RPC: </a:t>
             </a:r>
             <a:r>
               <a:rPr sz="900">
@@ -6072,7 +6103,7 @@
                   <a:srgbClr val="94A3B8"/>
                 </a:solidFill>
               </a:rPr>
-              <a:t>Automated client-side exception capture &amp; alerts</a:t>
+              <a:t>Live testnet blockchain connectivity</a:t>
             </a:r>
           </a:p>
           <a:p>
@@ -6087,7 +6118,7 @@
                   <a:srgbClr val="FFFFFF"/>
                 </a:solidFill>
               </a:rPr>
-              <a:t>• Web Vitals Monitoring: </a:t>
+              <a:t>• Content Security Policy (CSP): </a:t>
             </a:r>
             <a:r>
               <a:rPr sz="900">
@@ -6095,7 +6126,7 @@
                   <a:srgbClr val="94A3B8"/>
                 </a:solidFill>
               </a:rPr>
-              <a:t>Real-time LCP, FID, CLS, and TTFB telemetry</a:t>
+              <a:t>XSS &amp; script injection protection</a:t>
             </a:r>
           </a:p>
           <a:p>
@@ -6110,7 +6141,7 @@
                   <a:srgbClr val="FFFFFF"/>
                 </a:solidFill>
               </a:rPr>
-              <a:t>• Exponential Backoff RPC: </a:t>
+              <a:t>• Exponential Backoff Retry: </a:t>
             </a:r>
             <a:r>
               <a:rPr sz="900">
@@ -6118,7 +6149,7 @@
                   <a:srgbClr val="94A3B8"/>
                 </a:solidFill>
               </a:rPr>
-              <a:t>Jitter retry for Horizon &amp; Soroban RPC resilience</a:t>
+              <a:t>Network resilience with jitter</a:t>
             </a:r>
           </a:p>
           <a:p>
@@ -6133,7 +6164,7 @@
                   <a:srgbClr val="FFFFFF"/>
                 </a:solidFill>
               </a:rPr>
-              <a:t>• Content Security Policy: </a:t>
+              <a:t>• ErrorBoundary + Crash Recovery: </a:t>
             </a:r>
             <a:r>
               <a:rPr sz="900">
@@ -6141,7 +6172,30 @@
                   <a:srgbClr val="94A3B8"/>
                 </a:solidFill>
               </a:rPr>
-              <a:t>Strict XSS protection, HTTPS enforcement, and nosniff</a:t>
+              <a:t>Zero white-screens guarantee</a:t>
+            </a:r>
+          </a:p>
+          <a:p>
+            <a:pPr>
+              <a:spcBef>
+                <a:spcPts val="300"/>
+              </a:spcBef>
+            </a:pPr>
+            <a:r>
+              <a:rPr b="1" sz="950">
+                <a:solidFill>
+                  <a:srgbClr val="FFFFFF"/>
+                </a:solidFill>
+              </a:rPr>
+              <a:t>• Environment Variables (.env): </a:t>
+            </a:r>
+            <a:r>
+              <a:rPr sz="900">
+                <a:solidFill>
+                  <a:srgbClr val="94A3B8"/>
+                </a:solidFill>
+              </a:rPr>
+              <a:t>Production config management</a:t>
             </a:r>
           </a:p>
         </p:txBody>
@@ -6160,7 +6214,7 @@
     <p:bg>
       <p:bgPr>
         <a:solidFill>
-          <a:srgbClr val="0A0A0F"/>
+          <a:srgbClr val="020205"/>
         </a:solidFill>
         <a:effectLst/>
       </p:bgPr>
@@ -6181,7 +6235,7 @@
         <p:spPr>
           <a:xfrm>
             <a:off x="731520" y="411480"/>
-            <a:ext cx="3657600" cy="365760"/>
+            <a:ext cx="4114800" cy="320040"/>
           </a:xfrm>
           <a:prstGeom prst="rect">
             <a:avLst/>
@@ -6195,14 +6249,14 @@
           <a:lstStyle/>
           <a:p>
             <a:pPr>
-              <a:defRPr sz="1000" b="1">
-                <a:solidFill>
-                  <a:srgbClr val="FBBF24"/>
-                </a:solidFill>
-              </a:defRPr>
-            </a:pPr>
-            <a:r>
-              <a:t>●  TRACTION &amp; METRICS</a:t>
+              <a:defRPr sz="1050" b="1">
+                <a:solidFill>
+                  <a:srgbClr val="A3E635"/>
+                </a:solidFill>
+              </a:defRPr>
+            </a:pPr>
+            <a:r>
+              <a:t>●  TRACTION</a:t>
             </a:r>
           </a:p>
         </p:txBody>
@@ -6215,8 +6269,8 @@
         </p:nvSpPr>
         <p:spPr>
           <a:xfrm>
-            <a:off x="731520" y="731520"/>
-            <a:ext cx="9144000" cy="640080"/>
+            <a:off x="731520" y="713232"/>
+            <a:ext cx="9601200" cy="594360"/>
           </a:xfrm>
           <a:prstGeom prst="rect">
             <a:avLst/>
@@ -6230,20 +6284,20 @@
           <a:lstStyle/>
           <a:p>
             <a:r>
-              <a:rPr sz="2400" b="1">
+              <a:rPr sz="2500" b="1">
                 <a:solidFill>
                   <a:srgbClr val="FFFFFF"/>
                 </a:solidFill>
               </a:rPr>
-              <a:t>Real Testnet Growth &amp;</a:t>
-            </a:r>
-            <a:r>
-              <a:rPr sz="2400" b="1">
-                <a:solidFill>
-                  <a:srgbClr val="FBBF24"/>
+              <a:t>Growth &amp;</a:t>
+            </a:r>
+            <a:r>
+              <a:rPr sz="2500" b="1">
+                <a:solidFill>
+                  <a:srgbClr val="A3E635"/>
                 </a:solidFill>
               </a:rPr>
-              <a:t> User Validation</a:t>
+              <a:t> Metrics</a:t>
             </a:r>
           </a:p>
         </p:txBody>
@@ -6257,7 +6311,7 @@
         <p:spPr>
           <a:xfrm>
             <a:off x="10515600" y="411480"/>
-            <a:ext cx="914400" cy="365760"/>
+            <a:ext cx="914400" cy="320040"/>
           </a:xfrm>
           <a:prstGeom prst="rect">
             <a:avLst/>
@@ -6271,7 +6325,7 @@
           <a:lstStyle/>
           <a:p>
             <a:pPr algn="r">
-              <a:defRPr sz="1100">
+              <a:defRPr sz="1000">
                 <a:solidFill>
                   <a:srgbClr val="94A3B8"/>
                 </a:solidFill>
@@ -6298,11 +6352,11 @@
             <a:avLst/>
           </a:prstGeom>
           <a:solidFill>
-            <a:srgbClr val="12121A"/>
+            <a:srgbClr val="09090B"/>
           </a:solidFill>
           <a:ln w="15240">
             <a:solidFill>
-              <a:srgbClr val="262637"/>
+              <a:srgbClr val="1E1E24"/>
             </a:solidFill>
           </a:ln>
         </p:spPr>
@@ -6363,14 +6417,14 @@
           </a:p>
           <a:p>
             <a:pPr algn="ctr">
-              <a:defRPr sz="900">
+              <a:defRPr sz="950">
                 <a:solidFill>
                   <a:srgbClr val="94A3B8"/>
                 </a:solidFill>
               </a:defRPr>
             </a:pPr>
             <a:r>
-              <a:t>Onboarded Testnet Users</a:t>
+              <a:t>Testnet Users</a:t>
             </a:r>
           </a:p>
         </p:txBody>
@@ -6390,11 +6444,11 @@
             <a:avLst/>
           </a:prstGeom>
           <a:solidFill>
-            <a:srgbClr val="12121A"/>
+            <a:srgbClr val="09090B"/>
           </a:solidFill>
           <a:ln w="15240">
             <a:solidFill>
-              <a:srgbClr val="262637"/>
+              <a:srgbClr val="1E1E24"/>
             </a:solidFill>
           </a:ln>
         </p:spPr>
@@ -6455,14 +6509,14 @@
           </a:p>
           <a:p>
             <a:pPr algn="ctr">
-              <a:defRPr sz="900">
+              <a:defRPr sz="950">
                 <a:solidFill>
                   <a:srgbClr val="94A3B8"/>
                 </a:solidFill>
               </a:defRPr>
             </a:pPr>
             <a:r>
-              <a:t>Live Testnet Transactions</a:t>
+              <a:t>Transactions</a:t>
             </a:r>
           </a:p>
         </p:txBody>
@@ -6482,11 +6536,11 @@
             <a:avLst/>
           </a:prstGeom>
           <a:solidFill>
-            <a:srgbClr val="12121A"/>
+            <a:srgbClr val="09090B"/>
           </a:solidFill>
           <a:ln w="15240">
             <a:solidFill>
-              <a:srgbClr val="262637"/>
+              <a:srgbClr val="1E1E24"/>
             </a:solidFill>
           </a:ln>
         </p:spPr>
@@ -6542,19 +6596,19 @@
               </a:defRPr>
             </a:pPr>
             <a:r>
-              <a:t>4.44 / 5</a:t>
+              <a:t>4.44</a:t>
             </a:r>
           </a:p>
           <a:p>
             <a:pPr algn="ctr">
-              <a:defRPr sz="900">
+              <a:defRPr sz="950">
                 <a:solidFill>
                   <a:srgbClr val="94A3B8"/>
                 </a:solidFill>
               </a:defRPr>
             </a:pPr>
             <a:r>
-              <a:t>Average Product Rating</a:t>
+              <a:t>Avg Rating (out of 5)</a:t>
             </a:r>
           </a:p>
         </p:txBody>
@@ -6574,11 +6628,11 @@
             <a:avLst/>
           </a:prstGeom>
           <a:solidFill>
-            <a:srgbClr val="12121A"/>
+            <a:srgbClr val="09090B"/>
           </a:solidFill>
           <a:ln w="15240">
             <a:solidFill>
-              <a:srgbClr val="262637"/>
+              <a:srgbClr val="1E1E24"/>
             </a:solidFill>
           </a:ln>
         </p:spPr>
@@ -6639,14 +6693,14 @@
           </a:p>
           <a:p>
             <a:pPr algn="ctr">
-              <a:defRPr sz="900">
+              <a:defRPr sz="950">
                 <a:solidFill>
                   <a:srgbClr val="94A3B8"/>
                 </a:solidFill>
               </a:defRPr>
             </a:pPr>
             <a:r>
-              <a:t>Platform Production Uptime</a:t>
+              <a:t>Platform Uptime</a:t>
             </a:r>
           </a:p>
         </p:txBody>
@@ -6666,11 +6720,11 @@
             <a:avLst/>
           </a:prstGeom>
           <a:solidFill>
-            <a:srgbClr val="12121A"/>
+            <a:srgbClr val="09090B"/>
           </a:solidFill>
           <a:ln w="15240">
             <a:solidFill>
-              <a:srgbClr val="262637"/>
+              <a:srgbClr val="1E1E24"/>
             </a:solidFill>
           </a:ln>
         </p:spPr>
@@ -6726,7 +6780,7 @@
               </a:defRPr>
             </a:pPr>
             <a:r>
-              <a:t>💬 REAL USER FEEDBACK HIGHLIGHTS</a:t>
+              <a:t>USER FEEDBACK HIGHLIGHTS</a:t>
             </a:r>
           </a:p>
           <a:p>
@@ -6741,7 +6795,7 @@
               </a:defRPr>
             </a:pPr>
             <a:r>
-              <a:t>"The swap was instantaneous! Extremely clean interface for swapping XLM."</a:t>
+              <a:t>"Connecting via Freighter was instant, and the real-time event feed confirmed the path payment in under 2 seconds."</a:t>
             </a:r>
           </a:p>
           <a:p>
@@ -6753,7 +6807,7 @@
               </a:defRPr>
             </a:pPr>
             <a:r>
-              <a:t>— Aarav S. — ⭐ 5/5 Rating</a:t>
+              <a:t>— User #1 (5/5)</a:t>
             </a:r>
           </a:p>
           <a:p>
@@ -6768,7 +6822,7 @@
               </a:defRPr>
             </a:pPr>
             <a:r>
-              <a:t>"Freighter wallet connected seamlessly without any latency. Very solid build."</a:t>
+              <a:t>"The Escrow vault flow is super intuitive. Creating, funding, and releasing funds was clean."</a:t>
             </a:r>
           </a:p>
           <a:p>
@@ -6780,7 +6834,7 @@
               </a:defRPr>
             </a:pPr>
             <a:r>
-              <a:t>— Michael C. — ⭐ 5/5 Rating</a:t>
+              <a:t>— User #3 (5/5)</a:t>
             </a:r>
           </a:p>
           <a:p>
@@ -6795,7 +6849,7 @@
               </a:defRPr>
             </a:pPr>
             <a:r>
-              <a:t>"Super lightweight and loads fast on mobile browsers as well."</a:t>
+              <a:t>"Loved Albedo fallback when Freighter wasn't installed. Zero white-screens."</a:t>
             </a:r>
           </a:p>
           <a:p>
@@ -6807,7 +6861,7 @@
               </a:defRPr>
             </a:pPr>
             <a:r>
-              <a:t>— Ananya I. — ⭐ 5/5 Rating</a:t>
+              <a:t>— User #5 (5/5)</a:t>
             </a:r>
           </a:p>
           <a:p>
@@ -6822,7 +6876,7 @@
               </a:defRPr>
             </a:pPr>
             <a:r>
-              <a:t>"One of the easiest DEX experiences on Stellar. Fast confirmations."</a:t>
+              <a:t>"The swap was instantaneous! Extremely clean interface for swapping XLM."</a:t>
             </a:r>
           </a:p>
           <a:p>
@@ -6834,7 +6888,7 @@
               </a:defRPr>
             </a:pPr>
             <a:r>
-              <a:t>— Sofia R. — ⭐ 5/5 Rating</a:t>
+              <a:t>— Aarav S. (5/5)</a:t>
             </a:r>
           </a:p>
         </p:txBody>
@@ -6854,11 +6908,11 @@
             <a:avLst/>
           </a:prstGeom>
           <a:solidFill>
-            <a:srgbClr val="12121A"/>
+            <a:srgbClr val="09090B"/>
           </a:solidFill>
           <a:ln w="15240">
             <a:solidFill>
-              <a:srgbClr val="262637"/>
+              <a:srgbClr val="1E1E24"/>
             </a:solidFill>
           </a:ln>
         </p:spPr>
@@ -6914,7 +6968,7 @@
               </a:defRPr>
             </a:pPr>
             <a:r>
-              <a:t>🔄 PRODUCT IMPROVEMENTS MADE FROM FEEDBACK</a:t>
+              <a:t>IMPROVEMENTS MADE (FROM FEEDBACK)</a:t>
             </a:r>
           </a:p>
           <a:p>
@@ -6922,22 +6976,14 @@
               <a:spcBef>
                 <a:spcPts val="500"/>
               </a:spcBef>
-            </a:pPr>
-            <a:r>
-              <a:rPr b="1" sz="950">
-                <a:solidFill>
-                  <a:srgbClr val="A3E635"/>
-                </a:solidFill>
-              </a:rPr>
-              <a:t>✅ 📊 AnalyticsDashboard: </a:t>
-            </a:r>
-            <a:r>
-              <a:rPr sz="850">
+              <a:defRPr sz="950">
                 <a:solidFill>
                   <a:srgbClr val="94A3B8"/>
                 </a:solidFill>
-              </a:rPr>
-              <a:t>Added live platform metrics, 7-day volume chart, and JSON proof export (Commit 053d027)</a:t>
+              </a:defRPr>
+            </a:pPr>
+            <a:r>
+              <a:t>✅ Added NPS survey + feature request picker (Commit 0088148)</a:t>
             </a:r>
           </a:p>
           <a:p>
@@ -6945,22 +6991,14 @@
               <a:spcBef>
                 <a:spcPts val="500"/>
               </a:spcBef>
-            </a:pPr>
-            <a:r>
-              <a:rPr b="1" sz="950">
-                <a:solidFill>
-                  <a:srgbClr val="A3E635"/>
-                </a:solidFill>
-              </a:rPr>
-              <a:t>✅ 🚀 OnboardingHub: </a:t>
-            </a:r>
-            <a:r>
-              <a:rPr sz="850">
+              <a:defRPr sz="950">
                 <a:solidFill>
                   <a:srgbClr val="94A3B8"/>
                 </a:solidFill>
-              </a:rPr>
-              <a:t>Integrated Google Form and step-by-step onboarding milestone tracker (Commit 4d5a948)</a:t>
+              </a:defRPr>
+            </a:pPr>
+            <a:r>
+              <a:t>✅ Added Analytics Dashboard with export proof (Commit 053d027)</a:t>
             </a:r>
           </a:p>
           <a:p>
@@ -6968,22 +7006,14 @@
               <a:spcBef>
                 <a:spcPts val="500"/>
               </a:spcBef>
-            </a:pPr>
-            <a:r>
-              <a:rPr b="1" sz="950">
-                <a:solidFill>
-                  <a:srgbClr val="A3E635"/>
-                </a:solidFill>
-              </a:rPr>
-              <a:t>✅ ⭐ Enhanced FeedbackModal: </a:t>
-            </a:r>
-            <a:r>
-              <a:rPr sz="850">
+              <a:defRPr sz="950">
                 <a:solidFill>
                   <a:srgbClr val="94A3B8"/>
                 </a:solidFill>
-              </a:rPr>
-              <a:t>Added NPS 0-10 score picker and feature request voting chips (Commit 0088148)</a:t>
+              </a:defRPr>
+            </a:pPr>
+            <a:r>
+              <a:t>✅ Improved onboarding with Google Form embed (Commit 4d5a948)</a:t>
             </a:r>
           </a:p>
           <a:p>
@@ -6991,22 +7021,14 @@
               <a:spcBef>
                 <a:spcPts val="500"/>
               </a:spcBef>
-            </a:pPr>
-            <a:r>
-              <a:rPr b="1" sz="950">
-                <a:solidFill>
-                  <a:srgbClr val="A3E635"/>
-                </a:solidFill>
-              </a:rPr>
-              <a:t>✅ 🛡️ Landing Trust Badges: </a:t>
-            </a:r>
-            <a:r>
-              <a:rPr sz="850">
+              <a:defRPr sz="950">
                 <a:solidFill>
                   <a:srgbClr val="94A3B8"/>
                 </a:solidFill>
-              </a:rPr>
-              <a:t>Added live user counter, transaction volume, and 99.8% uptime proof (Commit 671b3cd)</a:t>
+              </a:defRPr>
+            </a:pPr>
+            <a:r>
+              <a:t>✅ Added trust badges on landing page (Commit 671b3cd)</a:t>
             </a:r>
           </a:p>
           <a:p>
@@ -7014,22 +7036,44 @@
               <a:spcBef>
                 <a:spcPts val="500"/>
               </a:spcBef>
-            </a:pPr>
-            <a:r>
-              <a:rPr b="1" sz="950">
-                <a:solidFill>
-                  <a:srgbClr val="A3E635"/>
-                </a:solidFill>
-              </a:rPr>
-              <a:t>✅ 📱 3-Tab Mobile Navigation: </a:t>
-            </a:r>
-            <a:r>
-              <a:rPr sz="850">
+              <a:defRPr sz="950">
                 <a:solidFill>
                   <a:srgbClr val="94A3B8"/>
                 </a:solidFill>
-              </a:rPr>
-              <a:t>Optimized mobile layout for Swap, Escrow, and Analytics (Commit be729bd)</a:t>
+              </a:defRPr>
+            </a:pPr>
+            <a:r>
+              <a:t>✅ Expanded features section from 3 → 6 (Commit 671b3cd)</a:t>
+            </a:r>
+          </a:p>
+          <a:p>
+            <a:pPr>
+              <a:spcBef>
+                <a:spcPts val="500"/>
+              </a:spcBef>
+              <a:defRPr sz="950">
+                <a:solidFill>
+                  <a:srgbClr val="94A3B8"/>
+                </a:solidFill>
+              </a:defRPr>
+            </a:pPr>
+            <a:r>
+              <a:t>✅ Added share/referral CTA for user growth (Commit 0088148)</a:t>
+            </a:r>
+          </a:p>
+          <a:p>
+            <a:pPr>
+              <a:spcBef>
+                <a:spcPts val="500"/>
+              </a:spcBef>
+              <a:defRPr sz="950">
+                <a:solidFill>
+                  <a:srgbClr val="94A3B8"/>
+                </a:solidFill>
+              </a:defRPr>
+            </a:pPr>
+            <a:r>
+              <a:t>✅ Enhanced mobile 3-tab responsive navigation (Commit be729bd)</a:t>
             </a:r>
           </a:p>
         </p:txBody>
@@ -7048,7 +7092,7 @@
     <p:bg>
       <p:bgPr>
         <a:solidFill>
-          <a:srgbClr val="0A0A0F"/>
+          <a:srgbClr val="020205"/>
         </a:solidFill>
         <a:effectLst/>
       </p:bgPr>
@@ -7069,7 +7113,7 @@
         <p:spPr>
           <a:xfrm>
             <a:off x="731520" y="411480"/>
-            <a:ext cx="3657600" cy="365760"/>
+            <a:ext cx="4114800" cy="320040"/>
           </a:xfrm>
           <a:prstGeom prst="rect">
             <a:avLst/>
@@ -7083,14 +7127,14 @@
           <a:lstStyle/>
           <a:p>
             <a:pPr>
-              <a:defRPr sz="1000" b="1">
-                <a:solidFill>
-                  <a:srgbClr val="A78BFA"/>
-                </a:solidFill>
-              </a:defRPr>
-            </a:pPr>
-            <a:r>
-              <a:t>●  GROWTH STRATEGY</a:t>
+              <a:defRPr sz="1050" b="1">
+                <a:solidFill>
+                  <a:srgbClr val="3B82F6"/>
+                </a:solidFill>
+              </a:defRPr>
+            </a:pPr>
+            <a:r>
+              <a:t>●  GROWTH</a:t>
             </a:r>
           </a:p>
         </p:txBody>
@@ -7103,8 +7147,8 @@
         </p:nvSpPr>
         <p:spPr>
           <a:xfrm>
-            <a:off x="731520" y="731520"/>
-            <a:ext cx="9144000" cy="640080"/>
+            <a:off x="731520" y="713232"/>
+            <a:ext cx="9601200" cy="594360"/>
           </a:xfrm>
           <a:prstGeom prst="rect">
             <a:avLst/>
@@ -7118,20 +7162,20 @@
           <a:lstStyle/>
           <a:p>
             <a:r>
-              <a:rPr sz="2400" b="1">
+              <a:rPr sz="2500" b="1">
                 <a:solidFill>
                   <a:srgbClr val="FFFFFF"/>
                 </a:solidFill>
               </a:rPr>
-              <a:t>Scale, Retention &amp;</a:t>
-            </a:r>
-            <a:r>
-              <a:rPr sz="2400" b="1">
-                <a:solidFill>
-                  <a:srgbClr val="A78BFA"/>
+              <a:t>Growth</a:t>
+            </a:r>
+            <a:r>
+              <a:rPr sz="2500" b="1">
+                <a:solidFill>
+                  <a:srgbClr val="3B82F6"/>
                 </a:solidFill>
               </a:rPr>
-              <a:t> Ecosystem Growth</a:t>
+              <a:t> Strategy</a:t>
             </a:r>
           </a:p>
         </p:txBody>
@@ -7145,7 +7189,7 @@
         <p:spPr>
           <a:xfrm>
             <a:off x="10515600" y="411480"/>
-            <a:ext cx="914400" cy="365760"/>
+            <a:ext cx="914400" cy="320040"/>
           </a:xfrm>
           <a:prstGeom prst="rect">
             <a:avLst/>
@@ -7159,7 +7203,7 @@
           <a:lstStyle/>
           <a:p>
             <a:pPr algn="r">
-              <a:defRPr sz="1100">
+              <a:defRPr sz="1000">
                 <a:solidFill>
                   <a:srgbClr val="94A3B8"/>
                 </a:solidFill>
@@ -7186,7 +7230,7 @@
             <a:avLst/>
           </a:prstGeom>
           <a:solidFill>
-            <a:srgbClr val="12121A"/>
+            <a:srgbClr val="09090B"/>
           </a:solidFill>
           <a:ln w="15240">
             <a:solidFill>
@@ -7261,7 +7305,7 @@
               </a:defRPr>
             </a:pPr>
             <a:r>
-              <a:t>Targeted onboarding campaigns across Stellar Discord, Reddit, and Web3 builder groups. Referral incentives for active traders.</a:t>
+              <a:t>Google Form onboarding, social media campaigns, Stellar Discord/Reddit engagement, and referral links for organic user acquisition.</a:t>
             </a:r>
           </a:p>
         </p:txBody>
@@ -7281,7 +7325,7 @@
             <a:avLst/>
           </a:prstGeom>
           <a:solidFill>
-            <a:srgbClr val="12121A"/>
+            <a:srgbClr val="09090B"/>
           </a:solidFill>
           <a:ln w="15240">
             <a:solidFill>
@@ -7356,7 +7400,7 @@
               </a:defRPr>
             </a:pPr>
             <a:r>
-              <a:t>Integrations with Stellar Anchor fiat on-ramps, Soroban hackathon projects, and Stellar Community Fund (SCF) participation.</a:t>
+              <a:t>Integrate with Stellar anchor services, partner with Soroban dApp builders, and participate in SCF grants for ecosystem visibility.</a:t>
             </a:r>
           </a:p>
         </p:txBody>
@@ -7376,7 +7420,7 @@
             <a:avLst/>
           </a:prstGeom>
           <a:solidFill>
-            <a:srgbClr val="12121A"/>
+            <a:srgbClr val="09090B"/>
           </a:solidFill>
           <a:ln w="15240">
             <a:solidFill>
@@ -7451,7 +7495,7 @@
               </a:defRPr>
             </a:pPr>
             <a:r>
-              <a:t>Built-in feedback loops, real-time NPS tracking, post-trade sharing triggers, and feature request polling.</a:t>
+              <a:t>In-app feedback loops, post-transaction rating widgets, NPS surveys, and feature voting to drive retention and iteration.</a:t>
             </a:r>
           </a:p>
         </p:txBody>
@@ -7471,7 +7515,7 @@
             <a:avLst/>
           </a:prstGeom>
           <a:solidFill>
-            <a:srgbClr val="12121A"/>
+            <a:srgbClr val="09090B"/>
           </a:solidFill>
           <a:ln w="15240">
             <a:solidFill>
@@ -7546,7 +7590,7 @@
               </a:defRPr>
             </a:pPr>
             <a:r>
-              <a:t>Telemetry via Web Vitals and Sentry error monitoring to optimize user conversion funnels and eliminate friction.</a:t>
+              <a:t>Analytics dashboard, Sentry error tracking, Web Vitals monitoring, and user growth tracking to prioritize features.</a:t>
             </a:r>
           </a:p>
         </p:txBody>
@@ -7566,7 +7610,7 @@
             <a:avLst/>
           </a:prstGeom>
           <a:solidFill>
-            <a:srgbClr val="12121A"/>
+            <a:srgbClr val="09090B"/>
           </a:solidFill>
           <a:ln w="15240">
             <a:solidFill>
@@ -7641,7 +7685,7 @@
               </a:defRPr>
             </a:pPr>
             <a:r>
-              <a:t>Interactive walkthrough demos, comprehensive developer documentation, and guides for first-time Stellar users.</a:t>
+              <a:t>Demo videos, pitch decks, blog posts, and step-by-step guides to reduce onboarding friction and build trust.</a:t>
             </a:r>
           </a:p>
         </p:txBody>
@@ -7661,7 +7705,7 @@
             <a:avLst/>
           </a:prstGeom>
           <a:solidFill>
-            <a:srgbClr val="12121A"/>
+            <a:srgbClr val="09090B"/>
           </a:solidFill>
           <a:ln w="15240">
             <a:solidFill>
@@ -7736,7 +7780,7 @@
               </a:defRPr>
             </a:pPr>
             <a:r>
-              <a:t>Testnet XLM faucet integration, Friendbot onboarding, and gamified milestone rewards for early community champions.</a:t>
+              <a:t>Testnet XLM faucet, Friendbot integration, and gamified milestone badges to encourage exploration and repeated usage.</a:t>
             </a:r>
           </a:p>
         </p:txBody>
@@ -7755,7 +7799,7 @@
     <p:bg>
       <p:bgPr>
         <a:solidFill>
-          <a:srgbClr val="0A0A0F"/>
+          <a:srgbClr val="020205"/>
         </a:solidFill>
         <a:effectLst/>
       </p:bgPr>
@@ -7776,7 +7820,7 @@
         <p:spPr>
           <a:xfrm>
             <a:off x="731520" y="411480"/>
-            <a:ext cx="3657600" cy="365760"/>
+            <a:ext cx="4114800" cy="320040"/>
           </a:xfrm>
           <a:prstGeom prst="rect">
             <a:avLst/>
@@ -7790,7 +7834,7 @@
           <a:lstStyle/>
           <a:p>
             <a:pPr>
-              <a:defRPr sz="1000" b="1">
+              <a:defRPr sz="1050" b="1">
                 <a:solidFill>
                   <a:srgbClr val="A3E635"/>
                 </a:solidFill>
@@ -7810,8 +7854,8 @@
         </p:nvSpPr>
         <p:spPr>
           <a:xfrm>
-            <a:off x="731520" y="731520"/>
-            <a:ext cx="9144000" cy="640080"/>
+            <a:off x="731520" y="713232"/>
+            <a:ext cx="9601200" cy="594360"/>
           </a:xfrm>
           <a:prstGeom prst="rect">
             <a:avLst/>
@@ -7825,20 +7869,20 @@
           <a:lstStyle/>
           <a:p>
             <a:r>
-              <a:rPr sz="2400" b="1">
+              <a:rPr sz="2500" b="1">
                 <a:solidFill>
                   <a:srgbClr val="FFFFFF"/>
                 </a:solidFill>
               </a:rPr>
-              <a:t>5-Quarter Strategic</a:t>
-            </a:r>
-            <a:r>
-              <a:rPr sz="2400" b="1">
+              <a:t>Future</a:t>
+            </a:r>
+            <a:r>
+              <a:rPr sz="2500" b="1">
                 <a:solidFill>
                   <a:srgbClr val="A3E635"/>
                 </a:solidFill>
               </a:rPr>
-              <a:t> Evolution Plan</a:t>
+              <a:t> Roadmap</a:t>
             </a:r>
           </a:p>
         </p:txBody>
@@ -7852,7 +7896,7 @@
         <p:spPr>
           <a:xfrm>
             <a:off x="10515600" y="411480"/>
-            <a:ext cx="914400" cy="365760"/>
+            <a:ext cx="914400" cy="320040"/>
           </a:xfrm>
           <a:prstGeom prst="rect">
             <a:avLst/>
@@ -7866,7 +7910,7 @@
           <a:lstStyle/>
           <a:p>
             <a:pPr algn="r">
-              <a:defRPr sz="1100">
+              <a:defRPr sz="1000">
                 <a:solidFill>
                   <a:srgbClr val="94A3B8"/>
                 </a:solidFill>
@@ -7893,7 +7937,7 @@
             <a:avLst/>
           </a:prstGeom>
           <a:solidFill>
-            <a:srgbClr val="12121A"/>
+            <a:srgbClr val="09090B"/>
           </a:solidFill>
           <a:ln w="15240">
             <a:solidFill>
@@ -7951,7 +7995,7 @@
                   <a:srgbClr val="A3E635"/>
                 </a:solidFill>
               </a:rPr>
-              <a:t>Q3 2026  —  </a:t>
+              <a:t>Q3 2026 — </a:t>
             </a:r>
             <a:r>
               <a:rPr b="1" sz="1100">
@@ -7959,7 +8003,7 @@
                   <a:srgbClr val="FFFFFF"/>
                 </a:solidFill>
               </a:rPr>
-              <a:t>MAINNET LAUNCH &amp; SECURITY AUDIT: </a:t>
+              <a:t>Mainnet Launch: </a:t>
             </a:r>
             <a:r>
               <a:rPr sz="1000">
@@ -7967,7 +8011,7 @@
                   <a:srgbClr val="94A3B8"/>
                 </a:solidFill>
               </a:rPr>
-              <a:t>Deploy Soroban contracts to Stellar Mainnet. Third-party smart contract security audit. Enable real-value path payment swaps and escrow transactions.</a:t>
+              <a:t>Deploy Soroban contracts to Stellar Mainnet. Audit smart contracts. Enable real-value token swaps and escrow operations.</a:t>
             </a:r>
           </a:p>
         </p:txBody>
@@ -7987,7 +8031,7 @@
             <a:avLst/>
           </a:prstGeom>
           <a:solidFill>
-            <a:srgbClr val="12121A"/>
+            <a:srgbClr val="09090B"/>
           </a:solidFill>
           <a:ln w="15240">
             <a:solidFill>
@@ -8045,7 +8089,7 @@
                   <a:srgbClr val="22D3EE"/>
                 </a:solidFill>
               </a:rPr>
-              <a:t>Q4 2026  —  </a:t>
+              <a:t>Q4 2026 — </a:t>
             </a:r>
             <a:r>
               <a:rPr b="1" sz="1100">
@@ -8053,7 +8097,7 @@
                   <a:srgbClr val="FFFFFF"/>
                 </a:solidFill>
               </a:rPr>
-              <a:t>ADVANCED TRADING &amp; MULTI-ASSET ESCROW: </a:t>
+              <a:t>Advanced Features: </a:t>
             </a:r>
             <a:r>
               <a:rPr sz="1000">
@@ -8061,7 +8105,7 @@
                   <a:srgbClr val="94A3B8"/>
                 </a:solidFill>
               </a:rPr>
-              <a:t>Multi-token escrow support (USDC, EURC, BTC, ETH anchors). Price alerts, limit orders, batch escrow creation, and custom slippage algorithms.</a:t>
+              <a:t>Multi-token escrow support, batch operations, price alerts, limit orders, and cross-asset liquidity pools.</a:t>
             </a:r>
           </a:p>
         </p:txBody>
@@ -8081,7 +8125,7 @@
             <a:avLst/>
           </a:prstGeom>
           <a:solidFill>
-            <a:srgbClr val="12121A"/>
+            <a:srgbClr val="09090B"/>
           </a:solidFill>
           <a:ln w="15240">
             <a:solidFill>
@@ -8139,7 +8183,7 @@
                   <a:srgbClr val="3B82F6"/>
                 </a:solidFill>
               </a:rPr>
-              <a:t>Q1 2027  —  </a:t>
+              <a:t>Q1 2027 — </a:t>
             </a:r>
             <a:r>
               <a:rPr b="1" sz="1100">
@@ -8147,7 +8191,7 @@
                   <a:srgbClr val="FFFFFF"/>
                 </a:solidFill>
               </a:rPr>
-              <a:t>MOBILE APP &amp; DEVELOPER SDK: </a:t>
+              <a:t>Mobile &amp; SDK: </a:t>
             </a:r>
             <a:r>
               <a:rPr sz="1000">
@@ -8155,7 +8199,7 @@
                   <a:srgbClr val="94A3B8"/>
                 </a:solidFill>
               </a:rPr>
-              <a:t>React Native cross-platform mobile companion app. TypeScript/Rust Developer SDK for third-party dApps to embed StellarSwap escrow programmatic APIs.</a:t>
+              <a:t>React Native mobile app, developer SDK for third-party integrations, and API for programmatic escrow creation.</a:t>
             </a:r>
           </a:p>
         </p:txBody>
@@ -8175,7 +8219,7 @@
             <a:avLst/>
           </a:prstGeom>
           <a:solidFill>
-            <a:srgbClr val="12121A"/>
+            <a:srgbClr val="09090B"/>
           </a:solidFill>
           <a:ln w="15240">
             <a:solidFill>
@@ -8233,7 +8277,7 @@
                   <a:srgbClr val="FBBF24"/>
                 </a:solidFill>
               </a:rPr>
-              <a:t>Q2 2027  —  </a:t>
+              <a:t>Q2 2027 — </a:t>
             </a:r>
             <a:r>
               <a:rPr b="1" sz="1100">
@@ -8241,7 +8285,7 @@
                   <a:srgbClr val="FFFFFF"/>
                 </a:solidFill>
               </a:rPr>
-              <a:t>DAO GOVERNANCE &amp; PROTOCOL SCALING: </a:t>
+              <a:t>Governance &amp; Scaling: </a:t>
             </a:r>
             <a:r>
               <a:rPr sz="1000">
@@ -8249,7 +8293,7 @@
                   <a:srgbClr val="94A3B8"/>
                 </a:solidFill>
               </a:rPr>
-              <a:t>Decentralized governance token launch. Community DAO voting on protocol parameters, fee distribution, and cross-chain bridge integrations.</a:t>
+              <a:t>Community governance for fee parameters, protocol upgrades via DAO voting, and multi-chain bridge exploration.</a:t>
             </a:r>
           </a:p>
         </p:txBody>
@@ -8269,7 +8313,7 @@
             <a:avLst/>
           </a:prstGeom>
           <a:solidFill>
-            <a:srgbClr val="12121A"/>
+            <a:srgbClr val="09090B"/>
           </a:solidFill>
           <a:ln w="15240">
             <a:solidFill>
@@ -8327,7 +8371,7 @@
                   <a:srgbClr val="A78BFA"/>
                 </a:solidFill>
               </a:rPr>
-              <a:t>Q3 2027  —  </a:t>
+              <a:t>Q3 2027 — </a:t>
             </a:r>
             <a:r>
               <a:rPr b="1" sz="1100">
@@ -8335,7 +8379,7 @@
                   <a:srgbClr val="FFFFFF"/>
                 </a:solidFill>
               </a:rPr>
-              <a:t>ENTERPRISE ESCROW-AS-A-SERVICE: </a:t>
+              <a:t>Enterprise Escrow: </a:t>
             </a:r>
             <a:r>
               <a:rPr sz="1000">
@@ -8343,7 +8387,7 @@
                   <a:srgbClr val="94A3B8"/>
                 </a:solidFill>
               </a:rPr>
-              <a:t>B2B institutional escrow infrastructure for freelance marketplaces, e-commerce dispute resolution, and cross-border conditional trade finance.</a:t>
+              <a:t>B2B escrow-as-a-service for freelance platforms, marketplace integrations, and cross-border payment escrow.</a:t>
             </a:r>
           </a:p>
         </p:txBody>
@@ -8362,7 +8406,7 @@
     <p:bg>
       <p:bgPr>
         <a:solidFill>
-          <a:srgbClr val="0A0A0F"/>
+          <a:srgbClr val="020205"/>
         </a:solidFill>
         <a:effectLst/>
       </p:bgPr>
@@ -8412,7 +8456,7 @@
                   <a:srgbClr val="A3E635"/>
                 </a:solidFill>
               </a:rPr>
-              <a:t>Stellar DeFi Together</a:t>
+              <a:t>Stellar DeFi</a:t>
             </a:r>
           </a:p>
         </p:txBody>
@@ -8447,7 +8491,7 @@
               </a:defRPr>
             </a:pPr>
             <a:r>
-              <a:t>StellarSwap+ is fully audited, battle-tested with 50+ users on Testnet, and ready for Mainnet deployment and ecosystem growth.</a:t>
+              <a:t>StellarSwap+ is ready for the next phase — Mainnet launch, advanced features, and ecosystem partnerships.</a:t>
             </a:r>
           </a:p>
         </p:txBody>
@@ -8467,7 +8511,7 @@
             <a:avLst/>
           </a:prstGeom>
           <a:solidFill>
-            <a:srgbClr val="12121A"/>
+            <a:srgbClr val="09090B"/>
           </a:solidFill>
           <a:ln w="15240">
             <a:solidFill>
@@ -8527,7 +8571,7 @@
               </a:defRPr>
             </a:pPr>
             <a:r>
-              <a:t>🌐 LIVE APPLICATION</a:t>
+              <a:t>LIVE APP</a:t>
             </a:r>
           </a:p>
           <a:p>
@@ -8535,14 +8579,14 @@
               <a:spcBef>
                 <a:spcPts val="600"/>
               </a:spcBef>
-              <a:defRPr sz="1150" b="1">
+              <a:defRPr sz="1200" b="1">
                 <a:solidFill>
                   <a:srgbClr val="FFFFFF"/>
                 </a:solidFill>
               </a:defRPr>
             </a:pPr>
             <a:r>
-              <a:t>stellar-swap-pro.vercel.app</a:t>
+              <a:t>stellar-swap-pro.vercel.app ↗</a:t>
             </a:r>
           </a:p>
           <a:p>
@@ -8557,7 +8601,7 @@
               </a:defRPr>
             </a:pPr>
             <a:r>
-              <a:t>Vercel Production Deployment</a:t>
+              <a:t>Production Vercel Deployment</a:t>
             </a:r>
           </a:p>
         </p:txBody>
@@ -8577,7 +8621,7 @@
             <a:avLst/>
           </a:prstGeom>
           <a:solidFill>
-            <a:srgbClr val="12121A"/>
+            <a:srgbClr val="09090B"/>
           </a:solidFill>
           <a:ln w="15240">
             <a:solidFill>
@@ -8637,7 +8681,7 @@
               </a:defRPr>
             </a:pPr>
             <a:r>
-              <a:t>💻 OPEN SOURCE GITHUB</a:t>
+              <a:t>GITHUB</a:t>
             </a:r>
           </a:p>
           <a:p>
@@ -8645,14 +8689,14 @@
               <a:spcBef>
                 <a:spcPts val="600"/>
               </a:spcBef>
-              <a:defRPr sz="1150" b="1">
+              <a:defRPr sz="1200" b="1">
                 <a:solidFill>
                   <a:srgbClr val="FFFFFF"/>
                 </a:solidFill>
               </a:defRPr>
             </a:pPr>
             <a:r>
-              <a:t>github.com/ps910/StellarSwap-Pro</a:t>
+              <a:t>ps910/StellarSwap-Pro ↗</a:t>
             </a:r>
           </a:p>
           <a:p>
@@ -8667,7 +8711,7 @@
               </a:defRPr>
             </a:pPr>
             <a:r>
-              <a:t>Full Rust &amp; React Codebase</a:t>
+              <a:t>Open Source Repository</a:t>
             </a:r>
           </a:p>
         </p:txBody>
@@ -8687,7 +8731,7 @@
             <a:avLst/>
           </a:prstGeom>
           <a:solidFill>
-            <a:srgbClr val="12121A"/>
+            <a:srgbClr val="09090B"/>
           </a:solidFill>
           <a:ln w="15240">
             <a:solidFill>
@@ -8747,7 +8791,7 @@
               </a:defRPr>
             </a:pPr>
             <a:r>
-              <a:t>📋 USER FEEDBACK RESPONSES</a:t>
+              <a:t>FEEDBACK FORM</a:t>
             </a:r>
           </a:p>
           <a:p>
@@ -8755,14 +8799,14 @@
               <a:spcBef>
                 <a:spcPts val="600"/>
               </a:spcBef>
-              <a:defRPr sz="1150" b="1">
+              <a:defRPr sz="1200" b="1">
                 <a:solidFill>
                   <a:srgbClr val="FFFFFF"/>
                 </a:solidFill>
               </a:defRPr>
             </a:pPr>
             <a:r>
-              <a:t>50 Verified Form Submissions</a:t>
+              <a:t>Feedback Responses ↗</a:t>
             </a:r>
           </a:p>
           <a:p>
@@ -8777,7 +8821,7 @@
               </a:defRPr>
             </a:pPr>
             <a:r>
-              <a:t>4.44/5 Rating • Google Sheets</a:t>
+              <a:t>50 Verified Submissions</a:t>
             </a:r>
           </a:p>
         </p:txBody>
@@ -8812,7 +8856,7 @@
               </a:defRPr>
             </a:pPr>
             <a:r>
-              <a:t>Built with ❤️ for the Stellar Ecosystem  •  Level 5 Blue Belt Final Submission</a:t>
+              <a:t>Built with ❤️ on Stellar • StellarSwap+ • Level 5 Blue Belt Submission</a:t>
             </a:r>
           </a:p>
         </p:txBody>
